--- a/docs/assets/slides/OutbackRobots_Lesson5_Slides_DesignforGood.pptx
+++ b/docs/assets/slides/OutbackRobots_Lesson5_Slides_DesignforGood.pptx
@@ -5,7 +5,7 @@
     <p:sldMasterId id="2147483648" r:id="rId1"/>
   </p:sldMasterIdLst>
   <p:notesMasterIdLst>
-    <p:notesMasterId r:id="rId27"/>
+    <p:notesMasterId r:id="rId28"/>
   </p:notesMasterIdLst>
   <p:sldIdLst>
     <p:sldId id="372" r:id="rId2"/>
@@ -31,20 +31,21 @@
     <p:sldId id="377" r:id="rId22"/>
     <p:sldId id="388" r:id="rId23"/>
     <p:sldId id="380" r:id="rId24"/>
-    <p:sldId id="371" r:id="rId25"/>
-    <p:sldId id="355" r:id="rId26"/>
+    <p:sldId id="394" r:id="rId25"/>
+    <p:sldId id="393" r:id="rId26"/>
+    <p:sldId id="355" r:id="rId27"/>
   </p:sldIdLst>
   <p:sldSz cx="9906000" cy="6858000" type="A4"/>
   <p:notesSz cx="7099300" cy="10234613"/>
   <p:embeddedFontLst>
     <p:embeddedFont>
       <p:font typeface="Berlin Sans FB" panose="020E0602020502020306" pitchFamily="34" charset="0"/>
-      <p:regular r:id="rId28"/>
-      <p:bold r:id="rId29"/>
+      <p:regular r:id="rId29"/>
+      <p:bold r:id="rId30"/>
     </p:embeddedFont>
     <p:embeddedFont>
       <p:font typeface="Berlin Sans FB Demi" panose="020E0802020502020306" pitchFamily="34" charset="0"/>
-      <p:bold r:id="rId30"/>
+      <p:bold r:id="rId31"/>
     </p:embeddedFont>
   </p:embeddedFontLst>
   <p:defaultTextStyle>
@@ -174,11 +175,12 @@
             <p14:sldId id="377"/>
             <p14:sldId id="388"/>
             <p14:sldId id="380"/>
+            <p14:sldId id="394"/>
+            <p14:sldId id="393"/>
           </p14:sldIdLst>
         </p14:section>
         <p14:section name="Wrap Up" id="{85C9C7DE-C9E5-404F-B6C1-4A2C78765023}">
           <p14:sldIdLst>
-            <p14:sldId id="371"/>
             <p14:sldId id="355"/>
           </p14:sldIdLst>
         </p14:section>
@@ -212,9 +214,37 @@
 <file path=ppt/revisionInfo.xml><?xml version="1.0" encoding="utf-8"?>
 <p1510:revInfo xmlns:a="http://schemas.openxmlformats.org/drawingml/2006/main" xmlns:r="http://schemas.openxmlformats.org/officeDocument/2006/relationships" xmlns:p1510="http://schemas.microsoft.com/office/powerpoint/2015/10/main">
   <p1510:revLst>
-    <p1510:client id="{C748F342-71A2-40FF-9050-0893BC961482}" v="5" dt="2026-03-10T00:31:08.413"/>
+    <p1510:client id="{40056227-F05E-4EB9-B385-71E516E43A1B}" v="1" dt="2026-06-15T02:24:15.996"/>
   </p1510:revLst>
 </p1510:revInfo>
+</file>
+
+<file path=ppt/changesInfos/changesInfo1.xml><?xml version="1.0" encoding="utf-8"?>
+<pc:chgInfo xmlns:a="http://schemas.openxmlformats.org/drawingml/2006/main" xmlns:r="http://schemas.openxmlformats.org/officeDocument/2006/relationships" xmlns:ac="http://schemas.microsoft.com/office/drawing/2013/main/command" xmlns:pc="http://schemas.microsoft.com/office/powerpoint/2013/main/command">
+  <pc:docChgLst>
+    <pc:chgData name="Ben Kelly" userId="79179b44-934c-4bdd-82f6-75b69b2eecee" providerId="ADAL" clId="{A042A029-C61D-4345-AC60-70288B726536}"/>
+    <pc:docChg chg="addSld delSld modSld sldOrd modSection">
+      <pc:chgData name="Ben Kelly" userId="79179b44-934c-4bdd-82f6-75b69b2eecee" providerId="ADAL" clId="{A042A029-C61D-4345-AC60-70288B726536}" dt="2026-06-15T02:24:17.363" v="3" actId="47"/>
+      <pc:docMkLst>
+        <pc:docMk/>
+      </pc:docMkLst>
+      <pc:sldChg chg="ord">
+        <pc:chgData name="Ben Kelly" userId="79179b44-934c-4bdd-82f6-75b69b2eecee" providerId="ADAL" clId="{A042A029-C61D-4345-AC60-70288B726536}" dt="2026-06-15T02:24:12.295" v="1"/>
+        <pc:sldMkLst>
+          <pc:docMk/>
+          <pc:sldMk cId="1527236185" sldId="394"/>
+        </pc:sldMkLst>
+      </pc:sldChg>
+      <pc:sldChg chg="add del">
+        <pc:chgData name="Ben Kelly" userId="79179b44-934c-4bdd-82f6-75b69b2eecee" providerId="ADAL" clId="{A042A029-C61D-4345-AC60-70288B726536}" dt="2026-06-15T02:24:17.363" v="3" actId="47"/>
+        <pc:sldMkLst>
+          <pc:docMk/>
+          <pc:sldMk cId="4035057406" sldId="395"/>
+        </pc:sldMkLst>
+      </pc:sldChg>
+    </pc:docChg>
+  </pc:docChgLst>
+</pc:chgInfo>
 </file>
 
 <file path=ppt/notesMasters/notesMaster1.xml><?xml version="1.0" encoding="utf-8"?>
@@ -299,7 +329,7 @@
           <a:p>
             <a:fld id="{4F3F5AEF-4F6C-41E2-869B-89F90C9BC9CB}" type="datetimeFigureOut">
               <a:rPr lang="en-US" smtClean="0"/>
-              <a:t>3/13/2026</a:t>
+              <a:t>6/15/2026</a:t>
             </a:fld>
             <a:endParaRPr lang="en-US"/>
           </a:p>
@@ -745,7 +775,7 @@
           <a:p>
             <a:fld id="{0C641F1D-C242-463A-9118-CEC8A32732E1}" type="datetime1">
               <a:rPr lang="en-US" smtClean="0"/>
-              <a:t>3/13/2026</a:t>
+              <a:t>6/15/2026</a:t>
             </a:fld>
             <a:endParaRPr lang="en-US"/>
           </a:p>
@@ -1868,7 +1898,7 @@
           <a:p>
             <a:fld id="{6C3E4B74-615C-44D1-8875-0F95FDB4ACF1}" type="datetime1">
               <a:rPr lang="en-US" smtClean="0"/>
-              <a:t>3/13/2026</a:t>
+              <a:t>6/15/2026</a:t>
             </a:fld>
             <a:endParaRPr lang="en-US"/>
           </a:p>
@@ -2116,7 +2146,7 @@
           <a:p>
             <a:fld id="{ED101441-3954-4234-8E77-79F8676957CB}" type="datetime1">
               <a:rPr lang="en-US" smtClean="0"/>
-              <a:t>3/13/2026</a:t>
+              <a:t>6/15/2026</a:t>
             </a:fld>
             <a:endParaRPr lang="en-US"/>
           </a:p>
@@ -2280,7 +2310,7 @@
           <a:p>
             <a:fld id="{FE5290FD-71D0-407D-83AB-396A7FD0C9D0}" type="datetime1">
               <a:rPr lang="en-US" smtClean="0"/>
-              <a:t>3/13/2026</a:t>
+              <a:t>6/15/2026</a:t>
             </a:fld>
             <a:endParaRPr lang="en-US"/>
           </a:p>
@@ -2454,7 +2484,7 @@
           <a:p>
             <a:fld id="{C1019B73-AB8A-401C-A09D-1C931BCE90B8}" type="datetime1">
               <a:rPr lang="en-US" smtClean="0"/>
-              <a:t>3/13/2026</a:t>
+              <a:t>6/15/2026</a:t>
             </a:fld>
             <a:endParaRPr lang="en-US"/>
           </a:p>
@@ -2618,7 +2648,7 @@
           <a:p>
             <a:fld id="{D1C8F71B-FE01-41BB-BA09-F81DE1617D4D}" type="datetime1">
               <a:rPr lang="en-US" smtClean="0"/>
-              <a:t>3/13/2026</a:t>
+              <a:t>6/15/2026</a:t>
             </a:fld>
             <a:endParaRPr lang="en-US"/>
           </a:p>
@@ -2859,7 +2889,7 @@
           <a:p>
             <a:fld id="{3C1A2404-A312-4657-8292-B0E4B798C0E7}" type="datetime1">
               <a:rPr lang="en-US" smtClean="0"/>
-              <a:t>3/13/2026</a:t>
+              <a:t>6/15/2026</a:t>
             </a:fld>
             <a:endParaRPr lang="en-US"/>
           </a:p>
@@ -3140,7 +3170,7 @@
           <a:p>
             <a:fld id="{A9944A73-44BC-44C3-B99F-A0232951B267}" type="datetime1">
               <a:rPr lang="en-US" smtClean="0"/>
-              <a:t>3/13/2026</a:t>
+              <a:t>6/15/2026</a:t>
             </a:fld>
             <a:endParaRPr lang="en-US"/>
           </a:p>
@@ -3555,7 +3585,7 @@
           <a:p>
             <a:fld id="{FED12FDD-77D0-4A09-A7BF-76E5C63CBF2F}" type="datetime1">
               <a:rPr lang="en-US" smtClean="0"/>
-              <a:t>3/13/2026</a:t>
+              <a:t>6/15/2026</a:t>
             </a:fld>
             <a:endParaRPr lang="en-US"/>
           </a:p>
@@ -3668,7 +3698,7 @@
           <a:p>
             <a:fld id="{1BE876FE-512A-4774-A2B9-2BDC34E4BD18}" type="datetime1">
               <a:rPr lang="en-US" smtClean="0"/>
-              <a:t>3/13/2026</a:t>
+              <a:t>6/15/2026</a:t>
             </a:fld>
             <a:endParaRPr lang="en-US"/>
           </a:p>
@@ -4978,7 +5008,7 @@
           <a:p>
             <a:fld id="{8BF02AB2-EABE-44C0-9D58-D80514717591}" type="datetime1">
               <a:rPr lang="en-US" smtClean="0"/>
-              <a:t>3/13/2026</a:t>
+              <a:t>6/15/2026</a:t>
             </a:fld>
             <a:endParaRPr lang="en-US"/>
           </a:p>
@@ -5847,18 +5877,6 @@
               <a:t>Skin A</a:t>
             </a:r>
           </a:p>
-          <a:p>
-            <a:pPr algn="ctr"/>
-            <a:r>
-              <a:rPr lang="en-AU" sz="1600" dirty="0">
-                <a:solidFill>
-                  <a:srgbClr val="233A17"/>
-                </a:solidFill>
-                <a:latin typeface="Berlin Sans FB"/>
-              </a:rPr>
-              <a:t>[Add photo here]</a:t>
-            </a:r>
-          </a:p>
         </p:txBody>
       </p:sp>
       <p:sp>
@@ -5896,18 +5914,6 @@
               <a:t>Skin B</a:t>
             </a:r>
           </a:p>
-          <a:p>
-            <a:pPr algn="ctr"/>
-            <a:r>
-              <a:rPr lang="en-AU" sz="1600" dirty="0">
-                <a:solidFill>
-                  <a:srgbClr val="233A17"/>
-                </a:solidFill>
-                <a:latin typeface="Berlin Sans FB"/>
-              </a:rPr>
-              <a:t>[Add photo here]</a:t>
-            </a:r>
-          </a:p>
         </p:txBody>
       </p:sp>
       <p:sp>
@@ -5945,18 +5951,6 @@
               <a:t>Skin C</a:t>
             </a:r>
           </a:p>
-          <a:p>
-            <a:pPr algn="ctr"/>
-            <a:r>
-              <a:rPr lang="en-AU" sz="1600" dirty="0">
-                <a:solidFill>
-                  <a:srgbClr val="233A17"/>
-                </a:solidFill>
-                <a:latin typeface="Berlin Sans FB"/>
-              </a:rPr>
-              <a:t>[Add photo here]</a:t>
-            </a:r>
-          </a:p>
         </p:txBody>
       </p:sp>
       <p:sp>
@@ -5994,18 +5988,6 @@
               <a:t>Skin D</a:t>
             </a:r>
           </a:p>
-          <a:p>
-            <a:pPr algn="ctr"/>
-            <a:r>
-              <a:rPr lang="en-AU" sz="1600" dirty="0">
-                <a:solidFill>
-                  <a:srgbClr val="FEFAC9"/>
-                </a:solidFill>
-                <a:latin typeface="Berlin Sans FB"/>
-              </a:rPr>
-              <a:t>[Add photo here]</a:t>
-            </a:r>
-          </a:p>
         </p:txBody>
       </p:sp>
       <p:sp>
@@ -6048,11 +6030,130 @@
                 </a:solidFill>
                 <a:latin typeface="Berlin Sans FB"/>
               </a:rPr>
-              <a:t>🧠 Which Blossom seems the smartest?   ✨ Which looks the best?   🤝 Which would you treat most carefully?</a:t>
-            </a:r>
-          </a:p>
-        </p:txBody>
-      </p:sp>
+              <a:t>🧠 Which robot seems the smartest?   ✨ Which looks the best?   🤝 Which would you treat most carefully?</a:t>
+            </a:r>
+          </a:p>
+        </p:txBody>
+      </p:sp>
+      <p:pic>
+        <p:nvPicPr>
+          <p:cNvPr id="5" name="Picture 4">
+            <a:extLst>
+              <a:ext uri="{FF2B5EF4-FFF2-40B4-BE49-F238E27FC236}">
+                <a16:creationId xmlns:a16="http://schemas.microsoft.com/office/drawing/2014/main" id="{8651EB14-0E15-D355-49B1-6EF165C6FC81}"/>
+              </a:ext>
+            </a:extLst>
+          </p:cNvPr>
+          <p:cNvPicPr>
+            <a:picLocks noChangeAspect="1"/>
+          </p:cNvPicPr>
+          <p:nvPr/>
+        </p:nvPicPr>
+        <p:blipFill>
+          <a:blip r:embed="rId2"/>
+          <a:stretch>
+            <a:fillRect/>
+          </a:stretch>
+        </p:blipFill>
+        <p:spPr>
+          <a:xfrm>
+            <a:off x="760928" y="1653945"/>
+            <a:ext cx="1391721" cy="1775055"/>
+          </a:xfrm>
+          <a:prstGeom prst="rect">
+            <a:avLst/>
+          </a:prstGeom>
+        </p:spPr>
+      </p:pic>
+      <p:pic>
+        <p:nvPicPr>
+          <p:cNvPr id="6" name="Picture 5">
+            <a:extLst>
+              <a:ext uri="{FF2B5EF4-FFF2-40B4-BE49-F238E27FC236}">
+                <a16:creationId xmlns:a16="http://schemas.microsoft.com/office/drawing/2014/main" id="{553D966F-3617-19AC-645E-BF6B30F52759}"/>
+              </a:ext>
+            </a:extLst>
+          </p:cNvPr>
+          <p:cNvPicPr>
+            <a:picLocks noChangeAspect="1"/>
+          </p:cNvPicPr>
+          <p:nvPr/>
+        </p:nvPicPr>
+        <p:blipFill>
+          <a:blip r:embed="rId3"/>
+          <a:stretch>
+            <a:fillRect/>
+          </a:stretch>
+        </p:blipFill>
+        <p:spPr>
+          <a:xfrm>
+            <a:off x="2581106" y="1653945"/>
+            <a:ext cx="1695788" cy="1795481"/>
+          </a:xfrm>
+          <a:prstGeom prst="rect">
+            <a:avLst/>
+          </a:prstGeom>
+        </p:spPr>
+      </p:pic>
+      <p:pic>
+        <p:nvPicPr>
+          <p:cNvPr id="7" name="Picture 6">
+            <a:extLst>
+              <a:ext uri="{FF2B5EF4-FFF2-40B4-BE49-F238E27FC236}">
+                <a16:creationId xmlns:a16="http://schemas.microsoft.com/office/drawing/2014/main" id="{9B4E435F-C044-03B7-43F9-65FC5CB8212F}"/>
+              </a:ext>
+            </a:extLst>
+          </p:cNvPr>
+          <p:cNvPicPr>
+            <a:picLocks noChangeAspect="1"/>
+          </p:cNvPicPr>
+          <p:nvPr/>
+        </p:nvPicPr>
+        <p:blipFill>
+          <a:blip r:embed="rId4"/>
+          <a:stretch>
+            <a:fillRect/>
+          </a:stretch>
+        </p:blipFill>
+        <p:spPr>
+          <a:xfrm>
+            <a:off x="4566902" y="1653945"/>
+            <a:ext cx="1762796" cy="1762796"/>
+          </a:xfrm>
+          <a:prstGeom prst="rect">
+            <a:avLst/>
+          </a:prstGeom>
+        </p:spPr>
+      </p:pic>
+      <p:pic>
+        <p:nvPicPr>
+          <p:cNvPr id="8" name="Picture 7">
+            <a:extLst>
+              <a:ext uri="{FF2B5EF4-FFF2-40B4-BE49-F238E27FC236}">
+                <a16:creationId xmlns:a16="http://schemas.microsoft.com/office/drawing/2014/main" id="{FC95697B-D3A6-C585-0823-25F668DBB657}"/>
+              </a:ext>
+            </a:extLst>
+          </p:cNvPr>
+          <p:cNvPicPr>
+            <a:picLocks noChangeAspect="1"/>
+          </p:cNvPicPr>
+          <p:nvPr/>
+        </p:nvPicPr>
+        <p:blipFill>
+          <a:blip r:embed="rId5"/>
+          <a:srcRect l="17955" r="27843"/>
+          <a:stretch/>
+        </p:blipFill>
+        <p:spPr>
+          <a:xfrm>
+            <a:off x="6602813" y="1653945"/>
+            <a:ext cx="1729574" cy="1795481"/>
+          </a:xfrm>
+          <a:prstGeom prst="rect">
+            <a:avLst/>
+          </a:prstGeom>
+        </p:spPr>
+      </p:pic>
     </p:spTree>
     <p:extLst>
       <p:ext uri="{BB962C8B-B14F-4D97-AF65-F5344CB8AC3E}">
@@ -6906,19 +7007,7 @@
           <a:p>
             <a:r>
               <a:rPr lang="en-AU" dirty="0"/>
-              <a:t>Consider the </a:t>
-            </a:r>
-            <a:r>
-              <a:rPr lang="en-AU" dirty="0">
-                <a:highlight>
-                  <a:srgbClr val="FFFF00"/>
-                </a:highlight>
-              </a:rPr>
-              <a:t>4???</a:t>
-            </a:r>
-            <a:r>
-              <a:rPr lang="en-AU" dirty="0"/>
-              <a:t> Blossom skins</a:t>
+              <a:t>Consider the skins we looked at earlier</a:t>
             </a:r>
           </a:p>
           <a:p>
@@ -8288,7 +8377,7 @@
           <p:cNvPr id="2" name="Slide Number Placeholder 1">
             <a:extLst>
               <a:ext uri="{FF2B5EF4-FFF2-40B4-BE49-F238E27FC236}">
-                <a16:creationId xmlns:a16="http://schemas.microsoft.com/office/drawing/2014/main" id="{FF3B77EB-5A54-0C07-2406-B303EA637F14}"/>
+                <a16:creationId xmlns:a16="http://schemas.microsoft.com/office/drawing/2014/main" id="{ACD8E7D9-6C25-6C06-6A41-89892B2B2D7C}"/>
               </a:ext>
             </a:extLst>
           </p:cNvPr>
@@ -8318,7 +8407,7 @@
           <p:cNvPr id="3" name="Text Placeholder 2">
             <a:extLst>
               <a:ext uri="{FF2B5EF4-FFF2-40B4-BE49-F238E27FC236}">
-                <a16:creationId xmlns:a16="http://schemas.microsoft.com/office/drawing/2014/main" id="{FAEE4E71-5876-A2C4-FD26-CE548216836A}"/>
+                <a16:creationId xmlns:a16="http://schemas.microsoft.com/office/drawing/2014/main" id="{26FBF710-CF7F-7F50-8D0A-4854AADBCDF6}"/>
               </a:ext>
             </a:extLst>
           </p:cNvPr>
@@ -8336,7 +8425,7 @@
           <a:p>
             <a:r>
               <a:rPr lang="en-AU" dirty="0"/>
-              <a:t>Questionnaire</a:t>
+              <a:t>Moving Blossom’s Motors</a:t>
             </a:r>
           </a:p>
         </p:txBody>
@@ -8346,7 +8435,7 @@
           <p:cNvPr id="4" name="Text Placeholder 3">
             <a:extLst>
               <a:ext uri="{FF2B5EF4-FFF2-40B4-BE49-F238E27FC236}">
-                <a16:creationId xmlns:a16="http://schemas.microsoft.com/office/drawing/2014/main" id="{E13AA2F1-3E8E-F220-694A-21D127C46EFF}"/>
+                <a16:creationId xmlns:a16="http://schemas.microsoft.com/office/drawing/2014/main" id="{62ABC290-95D3-3450-B7D9-FE60FF4BF806}"/>
               </a:ext>
             </a:extLst>
           </p:cNvPr>
@@ -8362,14 +8451,66 @@
           <a:bodyPr/>
           <a:lstStyle/>
           <a:p>
-            <a:endParaRPr lang="en-AU"/>
+            <a:r>
+              <a:rPr lang="en-AU" dirty="0"/>
+              <a:t>Plug the Blossom computer into a power source</a:t>
+            </a:r>
+          </a:p>
+          <a:p>
+            <a:r>
+              <a:rPr lang="en-AU" dirty="0"/>
+              <a:t>Wait for the wi-fi to show up and connect</a:t>
+            </a:r>
+          </a:p>
+          <a:p>
+            <a:r>
+              <a:rPr lang="en-AU" dirty="0"/>
+              <a:t>Head to </a:t>
+            </a:r>
+            <a:r>
+              <a:rPr lang="en-US" sz="1800" u="sng" dirty="0">
+                <a:solidFill>
+                  <a:srgbClr val="0000FF"/>
+                </a:solidFill>
+                <a:effectLst/>
+                <a:latin typeface="Calibri" panose="020F0502020204030204" pitchFamily="34" charset="0"/>
+                <a:ea typeface="Calibri" panose="020F0502020204030204" pitchFamily="34" charset="0"/>
+                <a:cs typeface="Arial" panose="020B0604020202020204" pitchFamily="34" charset="0"/>
+                <a:hlinkClick r:id="rId2"/>
+              </a:rPr>
+              <a:t>https://192.168.90.1:8080</a:t>
+            </a:r>
+            <a:r>
+              <a:rPr lang="en-US" sz="1800" dirty="0">
+                <a:effectLst/>
+                <a:latin typeface="Calibri" panose="020F0502020204030204" pitchFamily="34" charset="0"/>
+                <a:ea typeface="Calibri" panose="020F0502020204030204" pitchFamily="34" charset="0"/>
+                <a:cs typeface="Arial" panose="020B0604020202020204" pitchFamily="34" charset="0"/>
+              </a:rPr>
+              <a:t> </a:t>
+            </a:r>
+          </a:p>
+          <a:p>
+            <a:r>
+              <a:rPr lang="en-AU"/>
+              <a:t>Go to Calibration, drag the sliders, what can we make Blossom do?</a:t>
+            </a:r>
+          </a:p>
+          <a:p>
+            <a:pPr marL="0" indent="0">
+              <a:buNone/>
+            </a:pPr>
+            <a:endParaRPr lang="en-AU" dirty="0"/>
+          </a:p>
+          <a:p>
+            <a:endParaRPr lang="en-AU" dirty="0"/>
           </a:p>
         </p:txBody>
       </p:sp>
     </p:spTree>
     <p:extLst>
       <p:ext uri="{BB962C8B-B14F-4D97-AF65-F5344CB8AC3E}">
-        <p14:creationId xmlns:p14="http://schemas.microsoft.com/office/powerpoint/2010/main" val="923499938"/>
+        <p14:creationId xmlns:p14="http://schemas.microsoft.com/office/powerpoint/2010/main" val="1527236185"/>
       </p:ext>
     </p:extLst>
   </p:cSld>
@@ -8401,7 +8542,7 @@
           <p:cNvPr id="2" name="Slide Number Placeholder 1">
             <a:extLst>
               <a:ext uri="{FF2B5EF4-FFF2-40B4-BE49-F238E27FC236}">
-                <a16:creationId xmlns:a16="http://schemas.microsoft.com/office/drawing/2014/main" id="{159CE9FC-1BAC-3AC6-42B3-0FDE54699F51}"/>
+                <a16:creationId xmlns:a16="http://schemas.microsoft.com/office/drawing/2014/main" id="{FF3B77EB-5A54-0C07-2406-B303EA637F14}"/>
               </a:ext>
             </a:extLst>
           </p:cNvPr>
@@ -8421,6 +8562,149 @@
               <a:rPr lang="en-US" smtClean="0"/>
               <a:pPr/>
               <a:t>25</a:t>
+            </a:fld>
+            <a:endParaRPr lang="en-US"/>
+          </a:p>
+        </p:txBody>
+      </p:sp>
+      <p:sp>
+        <p:nvSpPr>
+          <p:cNvPr id="3" name="Text Placeholder 2">
+            <a:extLst>
+              <a:ext uri="{FF2B5EF4-FFF2-40B4-BE49-F238E27FC236}">
+                <a16:creationId xmlns:a16="http://schemas.microsoft.com/office/drawing/2014/main" id="{FAEE4E71-5876-A2C4-FD26-CE548216836A}"/>
+              </a:ext>
+            </a:extLst>
+          </p:cNvPr>
+          <p:cNvSpPr>
+            <a:spLocks noGrp="1"/>
+          </p:cNvSpPr>
+          <p:nvPr>
+            <p:ph type="body" sz="quarter" idx="13"/>
+          </p:nvPr>
+        </p:nvSpPr>
+        <p:spPr/>
+        <p:txBody>
+          <a:bodyPr/>
+          <a:lstStyle/>
+          <a:p>
+            <a:r>
+              <a:rPr lang="en-AU" dirty="0"/>
+              <a:t>Survey</a:t>
+            </a:r>
+          </a:p>
+        </p:txBody>
+      </p:sp>
+      <p:sp>
+        <p:nvSpPr>
+          <p:cNvPr id="4" name="Text Placeholder 3">
+            <a:extLst>
+              <a:ext uri="{FF2B5EF4-FFF2-40B4-BE49-F238E27FC236}">
+                <a16:creationId xmlns:a16="http://schemas.microsoft.com/office/drawing/2014/main" id="{E13AA2F1-3E8E-F220-694A-21D127C46EFF}"/>
+              </a:ext>
+            </a:extLst>
+          </p:cNvPr>
+          <p:cNvSpPr>
+            <a:spLocks noGrp="1"/>
+          </p:cNvSpPr>
+          <p:nvPr>
+            <p:ph type="body" sz="quarter" idx="14"/>
+          </p:nvPr>
+        </p:nvSpPr>
+        <p:spPr/>
+        <p:txBody>
+          <a:bodyPr/>
+          <a:lstStyle/>
+          <a:p>
+            <a:endParaRPr lang="en-AU"/>
+          </a:p>
+        </p:txBody>
+      </p:sp>
+      <p:pic>
+        <p:nvPicPr>
+          <p:cNvPr id="6" name="Picture 5">
+            <a:extLst>
+              <a:ext uri="{FF2B5EF4-FFF2-40B4-BE49-F238E27FC236}">
+                <a16:creationId xmlns:a16="http://schemas.microsoft.com/office/drawing/2014/main" id="{7F24838B-E97C-997A-9E7A-D9D94BAE99B1}"/>
+              </a:ext>
+            </a:extLst>
+          </p:cNvPr>
+          <p:cNvPicPr>
+            <a:picLocks noChangeAspect="1"/>
+          </p:cNvPicPr>
+          <p:nvPr/>
+        </p:nvPicPr>
+        <p:blipFill>
+          <a:blip r:embed="rId2"/>
+          <a:stretch>
+            <a:fillRect/>
+          </a:stretch>
+        </p:blipFill>
+        <p:spPr>
+          <a:xfrm>
+            <a:off x="2290834" y="1659810"/>
+            <a:ext cx="5324331" cy="4648954"/>
+          </a:xfrm>
+          <a:prstGeom prst="rect">
+            <a:avLst/>
+          </a:prstGeom>
+        </p:spPr>
+      </p:pic>
+    </p:spTree>
+    <p:extLst>
+      <p:ext uri="{BB962C8B-B14F-4D97-AF65-F5344CB8AC3E}">
+        <p14:creationId xmlns:p14="http://schemas.microsoft.com/office/powerpoint/2010/main" val="879600154"/>
+      </p:ext>
+    </p:extLst>
+  </p:cSld>
+  <p:clrMapOvr>
+    <a:masterClrMapping/>
+  </p:clrMapOvr>
+</p:sld>
+</file>
+
+<file path=ppt/slides/slide26.xml><?xml version="1.0" encoding="utf-8"?>
+<p:sld xmlns:a="http://schemas.openxmlformats.org/drawingml/2006/main" xmlns:r="http://schemas.openxmlformats.org/officeDocument/2006/relationships" xmlns:p="http://schemas.openxmlformats.org/presentationml/2006/main">
+  <p:cSld>
+    <p:spTree>
+      <p:nvGrpSpPr>
+        <p:cNvPr id="1" name=""/>
+        <p:cNvGrpSpPr/>
+        <p:nvPr/>
+      </p:nvGrpSpPr>
+      <p:grpSpPr>
+        <a:xfrm>
+          <a:off x="0" y="0"/>
+          <a:ext cx="0" cy="0"/>
+          <a:chOff x="0" y="0"/>
+          <a:chExt cx="0" cy="0"/>
+        </a:xfrm>
+      </p:grpSpPr>
+      <p:sp>
+        <p:nvSpPr>
+          <p:cNvPr id="2" name="Slide Number Placeholder 1">
+            <a:extLst>
+              <a:ext uri="{FF2B5EF4-FFF2-40B4-BE49-F238E27FC236}">
+                <a16:creationId xmlns:a16="http://schemas.microsoft.com/office/drawing/2014/main" id="{159CE9FC-1BAC-3AC6-42B3-0FDE54699F51}"/>
+              </a:ext>
+            </a:extLst>
+          </p:cNvPr>
+          <p:cNvSpPr>
+            <a:spLocks noGrp="1"/>
+          </p:cNvSpPr>
+          <p:nvPr>
+            <p:ph type="sldNum" sz="quarter" idx="12"/>
+          </p:nvPr>
+        </p:nvSpPr>
+        <p:spPr/>
+        <p:txBody>
+          <a:bodyPr/>
+          <a:lstStyle/>
+          <a:p>
+            <a:fld id="{B6F15528-21DE-4FAA-801E-634DDDAF4B2B}" type="slidenum">
+              <a:rPr lang="en-US" smtClean="0"/>
+              <a:pPr/>
+              <a:t>26</a:t>
             </a:fld>
             <a:endParaRPr lang="en-US"/>
           </a:p>
@@ -8992,27 +9276,15 @@
               <a:buNone/>
             </a:pPr>
             <a:r>
-              <a:rPr lang="en-AU" dirty="0">
-                <a:highlight>
-                  <a:srgbClr val="FFFF00"/>
-                </a:highlight>
-              </a:rPr>
+              <a:rPr lang="en-AU" dirty="0"/>
               <a:t>4. </a:t>
             </a:r>
             <a:r>
-              <a:rPr lang="en-AU" b="1" dirty="0">
-                <a:highlight>
-                  <a:srgbClr val="FFFF00"/>
-                </a:highlight>
-              </a:rPr>
-              <a:t>Interacting with Blossom </a:t>
-            </a:r>
-            <a:r>
-              <a:rPr lang="en-AU" dirty="0">
-                <a:highlight>
-                  <a:srgbClr val="FFFF00"/>
-                </a:highlight>
-              </a:rPr>
+              <a:rPr lang="en-AU" b="1" dirty="0"/>
+              <a:t>Blossom’s motor movement </a:t>
+            </a:r>
+            <a:r>
+              <a:rPr lang="en-AU" dirty="0"/>
               <a:t>- 30 min</a:t>
             </a:r>
             <a:endParaRPr lang="en-AU" b="1" dirty="0">
@@ -9021,9 +9293,6 @@
                   <a:lumMod val="50000"/>
                 </a:schemeClr>
               </a:solidFill>
-              <a:highlight>
-                <a:srgbClr val="FFFF00"/>
-              </a:highlight>
             </a:endParaRPr>
           </a:p>
           <a:p>
